--- a/decks/hist-plantagenets/hist-plantagenets_ch5_john-and-the-pope.pptx
+++ b/decks/hist-plantagenets/hist-plantagenets_ch5_john-and-the-pope.pptx
@@ -126,30 +126,30 @@
   <p:extLst>
     <p:ext uri="{521415D9-36F7-43E2-AB2F-B90AF26B5E84}">
       <p14:sectionLst xmlns:p14="http://schemas.microsoft.com/office/powerpoint/2010/main">
-        <p14:section name="Opening" id="{bfe6a1bf-085a-7134-56c5-7fd126974c0e}">
+        <p14:section name="Opening" id="{1eb39e80-df66-2940-af77-95b8870517dc}">
           <p14:sldIdLst>
             <p14:sldId id="256"/>
           </p14:sldIdLst>
         </p14:section>
-        <p14:section name="Gate" id="{5a0c2e07-46ea-9b66-5bb2-5a7a913dc8eb}">
+        <p14:section name="Gate" id="{d39db495-dceb-ec8e-4b57-07c2e44fa793}">
           <p14:sldIdLst>
             <p14:sldId id="257"/>
             <p14:sldId id="258"/>
           </p14:sldIdLst>
         </p14:section>
-        <p14:section name="Pre-teach" id="{3ef384de-af13-05bc-8923-050a913bebb1}">
+        <p14:section name="Pre-teach" id="{d38cf910-e749-e34a-8897-dc5a5a37230d}">
           <p14:sldIdLst>
             <p14:sldId id="259"/>
             <p14:sldId id="260"/>
           </p14:sldIdLst>
         </p14:section>
-        <p14:section name="Read-along" id="{af2ec924-395e-9e94-891e-5838b09901fc}">
+        <p14:section name="Read-along" id="{e0817d74-e732-4168-fa9d-bc7f636dfd1f}">
           <p14:sldIdLst>
             <p14:sldId id="261"/>
             <p14:sldId id="262"/>
           </p14:sldIdLst>
         </p14:section>
-        <p14:section name="Teach" id="{ec438380-72f1-8793-4b25-01e88ad43c72}">
+        <p14:section name="Teach" id="{4d26bf71-a0a0-83e5-5d75-206c31441183}">
           <p14:sldIdLst>
             <p14:sldId id="263"/>
             <p14:sldId id="264"/>
@@ -158,7 +158,7 @@
             <p14:sldId id="267"/>
           </p14:sldIdLst>
         </p14:section>
-        <p14:section name="Routes" id="{0777a3a7-27b1-22cf-a666-98411f6a4fd1}">
+        <p14:section name="Routes" id="{3b427d36-25ca-6d16-e0ae-3a5d4487602f}">
           <p14:sldIdLst>
             <p14:sldId id="268"/>
             <p14:sldId id="269"/>
@@ -166,12 +166,12 @@
             <p14:sldId id="271"/>
           </p14:sldIdLst>
         </p14:section>
-        <p14:section name="Close" id="{227e6efb-e6f3-9c80-2f52-f9f9db00c5e8}">
+        <p14:section name="Close" id="{09eafe29-4799-53a6-0827-9d04fc3af731}">
           <p14:sldIdLst>
             <p14:sldId id="272"/>
           </p14:sldIdLst>
         </p14:section>
-        <p14:section name="Answers" id="{ad3cb2af-ff57-18a9-e039-a42d827b4b5b}">
+        <p14:section name="Answers" id="{30b1f39e-fe09-ebec-d126-d15e3e307145}">
           <p14:sldIdLst>
             <p14:sldId id="273"/>
             <p14:sldId id="274"/>
